--- a/dist/초4/영어/표현과문화/초4_영어_표현과문화_02_생활예절비교.pptx
+++ b/dist/초4/영어/표현과문화/초4_영어_표현과문화_02_생활예절비교.pptx
@@ -121,13 +121,13 @@
   <p:extLst>
     <p:ext uri="{521415D9-36F7-43E2-AB2F-B90AF26B5E84}">
       <p14:sectionLst xmlns:p14="http://schemas.microsoft.com/office/powerpoint/2010/main">
-        <p14:section name="도입" id="{c4797a8c-a81e-28db-2bdb-25fa22e4f0e4}">
+        <p14:section name="도입" id="{122ef5ce-8381-9e64-af38-78669fa0c53a}">
           <p14:sldIdLst>
             <p14:sldId id="256"/>
             <p14:sldId id="257"/>
           </p14:sldIdLst>
         </p14:section>
-        <p14:section name="개념" id="{5a85853a-e1e5-f6b1-4ae6-e12843a5a634}">
+        <p14:section name="개념" id="{7d15f866-c585-d58f-6870-eba99a169323}">
           <p14:sldIdLst>
             <p14:sldId id="258"/>
             <p14:sldId id="259"/>
@@ -136,32 +136,32 @@
             <p14:sldId id="264"/>
           </p14:sldIdLst>
         </p14:section>
-        <p14:section name="연습" id="{dce14441-70c3-26cb-640b-02c0640e6de0}">
+        <p14:section name="연습" id="{6ca02445-6f8a-5fc5-a8fe-42bf1730bd3b}">
           <p14:sldIdLst>
             <p14:sldId id="261"/>
             <p14:sldId id="262"/>
             <p14:sldId id="265"/>
           </p14:sldIdLst>
         </p14:section>
-        <p14:section name="개념" id="{9c3973cf-8b65-1f70-4ca1-9e30e9707751}">
+        <p14:section name="개념" id="{acb19b13-a4e3-70f7-645e-72f436411111}">
           <p14:sldIdLst/>
         </p14:section>
-        <p14:section name="연습" id="{df08f1c8-6e98-c2f0-47f5-9beea5a87b64}">
+        <p14:section name="연습" id="{bed156a1-3cdc-1cf6-6186-fcba0f2061a5}">
           <p14:sldIdLst/>
         </p14:section>
-        <p14:section name="확인" id="{3e272b2c-d846-fe8f-e159-374b8a1768aa}">
+        <p14:section name="확인" id="{0ce680cd-2bdf-ccd8-1929-3637b6c72e8e}">
           <p14:sldIdLst>
             <p14:sldId id="266"/>
             <p14:sldId id="267"/>
             <p14:sldId id="268"/>
           </p14:sldIdLst>
         </p14:section>
-        <p14:section name="정리" id="{5f2d9cec-7e26-1bd4-1cb9-10799218c70f}">
+        <p14:section name="정리" id="{371b4be3-5ad8-f4ba-f12c-cc0e679fdf5c}">
           <p14:sldIdLst>
             <p14:sldId id="269"/>
           </p14:sldIdLst>
         </p14:section>
-        <p14:section name="보충" id="{5ffdb8b6-e9b7-96d7-6326-d0947d5e7d19}">
+        <p14:section name="보충" id="{ba6c9474-ff8b-0d44-4c7b-b2f9f97c778b}">
           <p14:sldIdLst>
             <p14:sldId id="270"/>
           </p14:sldIdLst>
